--- a/04-presentation/Speaking Data.pptx
+++ b/04-presentation/Speaking Data.pptx
@@ -18766,7 +18766,7 @@
                 <a:ea typeface="Calibri" pitchFamily="34" charset="-122"/>
                 <a:cs typeface="Calibri" pitchFamily="34" charset="-120"/>
               </a:rPr>
-              <a:t>Key insight: 'Willing but Blocked' scores 3.8 on Motivation but 2.1 on Opportunity. More training won't move them — removing barriers will.</a:t>
+              <a:t>Key insight: 'Willing but Blocked' scores 3.8 on Motivation but 2.1 on Opportunity. More training won't move them. Removing barriers will.</a:t>
             </a:r>
             <a:endParaRPr lang="en-US" sz="1600" dirty="0"/>
           </a:p>
